--- a/Deck_DPM_CHU_Lyon.pptx
+++ b/Deck_DPM_CHU_Lyon.pptx
@@ -152,7 +152,7 @@
   <pc:docChgLst>
     <pc:chgData name="Elodie Toufaili" userId="6931ca539df5403f" providerId="LiveId" clId="{890880B0-7419-4F2F-A4FC-4C691C492E84}"/>
     <pc:docChg chg="undo custSel delSld modSld sldOrd">
-      <pc:chgData name="Elodie Toufaili" userId="6931ca539df5403f" providerId="LiveId" clId="{890880B0-7419-4F2F-A4FC-4C691C492E84}" dt="2026-06-29T13:51:26.669" v="889" actId="20577"/>
+      <pc:chgData name="Elodie Toufaili" userId="6931ca539df5403f" providerId="LiveId" clId="{890880B0-7419-4F2F-A4FC-4C691C492E84}" dt="2026-06-29T14:02:19.337" v="953" actId="20577"/>
       <pc:docMkLst>
         <pc:docMk/>
       </pc:docMkLst>
@@ -402,13 +402,13 @@
         </pc:sldMkLst>
       </pc:sldChg>
       <pc:sldChg chg="modSp mod modNotesTx">
-        <pc:chgData name="Elodie Toufaili" userId="6931ca539df5403f" providerId="LiveId" clId="{890880B0-7419-4F2F-A4FC-4C691C492E84}" dt="2026-06-29T13:51:26.669" v="889" actId="20577"/>
+        <pc:chgData name="Elodie Toufaili" userId="6931ca539df5403f" providerId="LiveId" clId="{890880B0-7419-4F2F-A4FC-4C691C492E84}" dt="2026-06-29T14:02:19.337" v="953" actId="20577"/>
         <pc:sldMkLst>
           <pc:docMk/>
           <pc:sldMk cId="0" sldId="275"/>
         </pc:sldMkLst>
         <pc:spChg chg="mod">
-          <ac:chgData name="Elodie Toufaili" userId="6931ca539df5403f" providerId="LiveId" clId="{890880B0-7419-4F2F-A4FC-4C691C492E84}" dt="2026-06-29T13:29:34.924" v="773" actId="20577"/>
+          <ac:chgData name="Elodie Toufaili" userId="6931ca539df5403f" providerId="LiveId" clId="{890880B0-7419-4F2F-A4FC-4C691C492E84}" dt="2026-06-29T14:02:19.337" v="953" actId="20577"/>
           <ac:spMkLst>
             <pc:docMk/>
             <pc:sldMk cId="0" sldId="275"/>
@@ -424,11 +424,19 @@
           </ac:spMkLst>
         </pc:spChg>
         <pc:spChg chg="mod">
-          <ac:chgData name="Elodie Toufaili" userId="6931ca539df5403f" providerId="LiveId" clId="{890880B0-7419-4F2F-A4FC-4C691C492E84}" dt="2026-06-29T13:32:00.546" v="804" actId="20577"/>
+          <ac:chgData name="Elodie Toufaili" userId="6931ca539df5403f" providerId="LiveId" clId="{890880B0-7419-4F2F-A4FC-4C691C492E84}" dt="2026-06-29T14:00:12.855" v="951" actId="20577"/>
           <ac:spMkLst>
             <pc:docMk/>
             <pc:sldMk cId="0" sldId="275"/>
             <ac:spMk id="13" creationId="{00000000-0000-0000-0000-000000000000}"/>
+          </ac:spMkLst>
+        </pc:spChg>
+        <pc:spChg chg="mod">
+          <ac:chgData name="Elodie Toufaili" userId="6931ca539df5403f" providerId="LiveId" clId="{890880B0-7419-4F2F-A4FC-4C691C492E84}" dt="2026-06-29T13:54:11.168" v="904" actId="6549"/>
+          <ac:spMkLst>
+            <pc:docMk/>
+            <pc:sldMk cId="0" sldId="275"/>
+            <ac:spMk id="14" creationId="{00000000-0000-0000-0000-000000000000}"/>
           </ac:spMkLst>
         </pc:spChg>
       </pc:sldChg>
@@ -22359,7 +22367,62 @@
                 <a:ea typeface="Calibri" pitchFamily="34" charset="-122"/>
                 <a:cs typeface="Calibri" pitchFamily="34" charset="-120"/>
               </a:rPr>
-              <a:t>Classification : normal / anormal</a:t>
+              <a:t>Classification : normal / Covid / </a:t>
+            </a:r>
+            <a:r>
+              <a:rPr lang="en-US" sz="1050" dirty="0" err="1">
+                <a:solidFill>
+                  <a:srgbClr val="E8EEF2"/>
+                </a:solidFill>
+                <a:latin typeface="Calibri" pitchFamily="34" charset="0"/>
+                <a:ea typeface="Calibri" pitchFamily="34" charset="-122"/>
+                <a:cs typeface="Calibri" pitchFamily="34" charset="-120"/>
+              </a:rPr>
+              <a:t>Pneumonie</a:t>
+            </a:r>
+            <a:r>
+              <a:rPr lang="en-US" sz="1050" dirty="0">
+                <a:solidFill>
+                  <a:srgbClr val="E8EEF2"/>
+                </a:solidFill>
+                <a:latin typeface="Calibri" pitchFamily="34" charset="0"/>
+                <a:ea typeface="Calibri" pitchFamily="34" charset="-122"/>
+                <a:cs typeface="Calibri" pitchFamily="34" charset="-120"/>
+              </a:rPr>
+              <a:t> /</a:t>
+            </a:r>
+            <a:r>
+              <a:rPr lang="en-US" sz="1050" dirty="0" err="1">
+                <a:solidFill>
+                  <a:srgbClr val="E8EEF2"/>
+                </a:solidFill>
+                <a:latin typeface="Calibri" pitchFamily="34" charset="0"/>
+                <a:ea typeface="Calibri" pitchFamily="34" charset="-122"/>
+                <a:cs typeface="Calibri" pitchFamily="34" charset="-120"/>
+              </a:rPr>
+              <a:t>Opacité</a:t>
+            </a:r>
+            <a:r>
+              <a:rPr lang="en-US" sz="1050" dirty="0">
+                <a:solidFill>
+                  <a:srgbClr val="E8EEF2"/>
+                </a:solidFill>
+                <a:latin typeface="Calibri" pitchFamily="34" charset="0"/>
+                <a:ea typeface="Calibri" pitchFamily="34" charset="-122"/>
+                <a:cs typeface="Calibri" pitchFamily="34" charset="-120"/>
+              </a:rPr>
+              <a:t> </a:t>
+            </a:r>
+            <a:r>
+              <a:rPr lang="en-US" sz="1050" dirty="0" err="1">
+                <a:solidFill>
+                  <a:srgbClr val="E8EEF2"/>
+                </a:solidFill>
+                <a:latin typeface="Calibri" pitchFamily="34" charset="0"/>
+                <a:ea typeface="Calibri" pitchFamily="34" charset="-122"/>
+                <a:cs typeface="Calibri" pitchFamily="34" charset="-120"/>
+              </a:rPr>
+              <a:t>pulmonaire</a:t>
             </a:r>
             <a:endParaRPr lang="en-US" sz="1050" dirty="0"/>
           </a:p>
@@ -22802,7 +22865,7 @@
                 <a:ea typeface="Calibri" pitchFamily="34" charset="-122"/>
                 <a:cs typeface="Calibri" pitchFamily="34" charset="-120"/>
               </a:rPr>
-              <a:t>✓ 2 classes</a:t>
+              <a:t>✓ 4 classes</a:t>
             </a:r>
             <a:endParaRPr lang="en-US" sz="1100" dirty="0"/>
           </a:p>
@@ -22981,7 +23044,7 @@
                 <a:ea typeface="Calibri" pitchFamily="34" charset="-122"/>
                 <a:cs typeface="Calibri" pitchFamily="34" charset="-120"/>
               </a:rPr>
-              <a:t>Projet DPM — CHU de Lyon · RadioPredict</a:t>
+              <a:t>Projet DPM — CHU de Lyon</a:t>
             </a:r>
             <a:endParaRPr lang="en-US" sz="800" dirty="0"/>
           </a:p>
